--- a/EduFund_Pitch_Deck_v2.pptx
+++ b/EduFund_Pitch_Deck_v2.pptx
@@ -5,18 +5,18 @@
     <p:sldMasterId id="2147483648" r:id="rId1"/>
   </p:sldMasterIdLst>
   <p:sldIdLst>
-    <p:sldId id="256" r:id="rId7"/>
-    <p:sldId id="257" r:id="rId8"/>
-    <p:sldId id="258" r:id="rId9"/>
-    <p:sldId id="259" r:id="rId10"/>
-    <p:sldId id="260" r:id="rId11"/>
-    <p:sldId id="261" r:id="rId12"/>
-    <p:sldId id="262" r:id="rId13"/>
-    <p:sldId id="263" r:id="rId14"/>
-    <p:sldId id="264" r:id="rId15"/>
-    <p:sldId id="265" r:id="rId16"/>
+    <p:sldId id="256" r:id="rId2"/>
+    <p:sldId id="257" r:id="rId3"/>
+    <p:sldId id="258" r:id="rId4"/>
+    <p:sldId id="259" r:id="rId5"/>
+    <p:sldId id="260" r:id="rId6"/>
+    <p:sldId id="261" r:id="rId7"/>
+    <p:sldId id="262" r:id="rId8"/>
+    <p:sldId id="263" r:id="rId9"/>
+    <p:sldId id="264" r:id="rId10"/>
+    <p:sldId id="265" r:id="rId11"/>
   </p:sldIdLst>
-  <p:sldSz cx="12191695" cy="6858000" type="screen4x3"/>
+  <p:sldSz cx="12192000" cy="6858000"/>
   <p:notesSz cx="6858000" cy="9144000"/>
   <p:defaultTextStyle>
     <a:defPPr>
@@ -113,6 +113,22 @@
       </a:defRPr>
     </a:lvl9pPr>
   </p:defaultTextStyle>
+  <p:extLst>
+    <p:ext uri="{EFAFB233-063F-42B5-8137-9DF3F51BA10A}">
+      <p15:sldGuideLst xmlns:p15="http://schemas.microsoft.com/office/powerpoint/2012/main">
+        <p15:guide id="1" orient="horz" pos="2160">
+          <p15:clr>
+            <a:srgbClr val="A4A3A4"/>
+          </p15:clr>
+        </p15:guide>
+        <p15:guide id="2" pos="2880">
+          <p15:clr>
+            <a:srgbClr val="A4A3A4"/>
+          </p15:clr>
+        </p15:guide>
+      </p15:sldGuideLst>
+    </p:ext>
+  </p:extLst>
 </p:presentation>
 </file>
 
@@ -154,10 +170,9 @@
           <a:lstStyle/>
           <a:p>
             <a:r>
-              <a:rPr lang="en-US" smtClean="0"/>
+              <a:rPr lang="en-US"/>
               <a:t>Click to edit Master title style</a:t>
             </a:r>
-            <a:endParaRPr lang="en-US"/>
           </a:p>
         </p:txBody>
       </p:sp>
@@ -273,10 +288,9 @@
           </a:lstStyle>
           <a:p>
             <a:r>
-              <a:rPr lang="en-US" smtClean="0"/>
+              <a:rPr lang="en-US"/>
               <a:t>Click to edit Master subtitle style</a:t>
             </a:r>
-            <a:endParaRPr lang="en-US"/>
           </a:p>
         </p:txBody>
       </p:sp>
@@ -297,7 +311,7 @@
           <a:p>
             <a:fld id="{5BCAD085-E8A6-8845-BD4E-CB4CCA059FC4}" type="datetimeFigureOut">
               <a:rPr lang="en-US" smtClean="0"/>
-              <a:t>1/27/13</a:t>
+              <a:t>9/24/2026</a:t>
             </a:fld>
             <a:endParaRPr lang="en-US"/>
           </a:p>
@@ -391,10 +405,9 @@
           <a:lstStyle/>
           <a:p>
             <a:r>
-              <a:rPr lang="en-US" smtClean="0"/>
+              <a:rPr lang="en-US"/>
               <a:t>Click to edit Master title style</a:t>
             </a:r>
-            <a:endParaRPr lang="en-US"/>
           </a:p>
         </p:txBody>
       </p:sp>
@@ -415,38 +428,37 @@
           <a:p>
             <a:pPr lvl="0"/>
             <a:r>
-              <a:rPr lang="en-US" smtClean="0"/>
+              <a:rPr lang="en-US"/>
               <a:t>Click to edit Master text styles</a:t>
             </a:r>
           </a:p>
           <a:p>
             <a:pPr lvl="1"/>
             <a:r>
-              <a:rPr lang="en-US" smtClean="0"/>
+              <a:rPr lang="en-US"/>
               <a:t>Second level</a:t>
             </a:r>
           </a:p>
           <a:p>
             <a:pPr lvl="2"/>
             <a:r>
-              <a:rPr lang="en-US" smtClean="0"/>
+              <a:rPr lang="en-US"/>
               <a:t>Third level</a:t>
             </a:r>
           </a:p>
           <a:p>
             <a:pPr lvl="3"/>
             <a:r>
-              <a:rPr lang="en-US" smtClean="0"/>
+              <a:rPr lang="en-US"/>
               <a:t>Fourth level</a:t>
             </a:r>
           </a:p>
           <a:p>
             <a:pPr lvl="4"/>
             <a:r>
-              <a:rPr lang="en-US" smtClean="0"/>
+              <a:rPr lang="en-US"/>
               <a:t>Fifth level</a:t>
             </a:r>
-            <a:endParaRPr lang="en-US"/>
           </a:p>
         </p:txBody>
       </p:sp>
@@ -467,7 +479,7 @@
           <a:p>
             <a:fld id="{5BCAD085-E8A6-8845-BD4E-CB4CCA059FC4}" type="datetimeFigureOut">
               <a:rPr lang="en-US" smtClean="0"/>
-              <a:t>1/27/13</a:t>
+              <a:t>9/24/2026</a:t>
             </a:fld>
             <a:endParaRPr lang="en-US"/>
           </a:p>
@@ -566,10 +578,9 @@
           <a:lstStyle/>
           <a:p>
             <a:r>
-              <a:rPr lang="en-US" smtClean="0"/>
+              <a:rPr lang="en-US"/>
               <a:t>Click to edit Master title style</a:t>
             </a:r>
-            <a:endParaRPr lang="en-US"/>
           </a:p>
         </p:txBody>
       </p:sp>
@@ -595,38 +606,37 @@
           <a:p>
             <a:pPr lvl="0"/>
             <a:r>
-              <a:rPr lang="en-US" smtClean="0"/>
+              <a:rPr lang="en-US"/>
               <a:t>Click to edit Master text styles</a:t>
             </a:r>
           </a:p>
           <a:p>
             <a:pPr lvl="1"/>
             <a:r>
-              <a:rPr lang="en-US" smtClean="0"/>
+              <a:rPr lang="en-US"/>
               <a:t>Second level</a:t>
             </a:r>
           </a:p>
           <a:p>
             <a:pPr lvl="2"/>
             <a:r>
-              <a:rPr lang="en-US" smtClean="0"/>
+              <a:rPr lang="en-US"/>
               <a:t>Third level</a:t>
             </a:r>
           </a:p>
           <a:p>
             <a:pPr lvl="3"/>
             <a:r>
-              <a:rPr lang="en-US" smtClean="0"/>
+              <a:rPr lang="en-US"/>
               <a:t>Fourth level</a:t>
             </a:r>
           </a:p>
           <a:p>
             <a:pPr lvl="4"/>
             <a:r>
-              <a:rPr lang="en-US" smtClean="0"/>
+              <a:rPr lang="en-US"/>
               <a:t>Fifth level</a:t>
             </a:r>
-            <a:endParaRPr lang="en-US"/>
           </a:p>
         </p:txBody>
       </p:sp>
@@ -647,7 +657,7 @@
           <a:p>
             <a:fld id="{5BCAD085-E8A6-8845-BD4E-CB4CCA059FC4}" type="datetimeFigureOut">
               <a:rPr lang="en-US" smtClean="0"/>
-              <a:t>1/27/13</a:t>
+              <a:t>9/24/2026</a:t>
             </a:fld>
             <a:endParaRPr lang="en-US"/>
           </a:p>
@@ -741,10 +751,9 @@
           <a:lstStyle/>
           <a:p>
             <a:r>
-              <a:rPr lang="en-US" smtClean="0"/>
+              <a:rPr lang="en-US"/>
               <a:t>Click to edit Master title style</a:t>
             </a:r>
-            <a:endParaRPr lang="en-US"/>
           </a:p>
         </p:txBody>
       </p:sp>
@@ -765,38 +774,37 @@
           <a:p>
             <a:pPr lvl="0"/>
             <a:r>
-              <a:rPr lang="en-US" smtClean="0"/>
+              <a:rPr lang="en-US"/>
               <a:t>Click to edit Master text styles</a:t>
             </a:r>
           </a:p>
           <a:p>
             <a:pPr lvl="1"/>
             <a:r>
-              <a:rPr lang="en-US" smtClean="0"/>
+              <a:rPr lang="en-US"/>
               <a:t>Second level</a:t>
             </a:r>
           </a:p>
           <a:p>
             <a:pPr lvl="2"/>
             <a:r>
-              <a:rPr lang="en-US" smtClean="0"/>
+              <a:rPr lang="en-US"/>
               <a:t>Third level</a:t>
             </a:r>
           </a:p>
           <a:p>
             <a:pPr lvl="3"/>
             <a:r>
-              <a:rPr lang="en-US" smtClean="0"/>
+              <a:rPr lang="en-US"/>
               <a:t>Fourth level</a:t>
             </a:r>
           </a:p>
           <a:p>
             <a:pPr lvl="4"/>
             <a:r>
-              <a:rPr lang="en-US" smtClean="0"/>
+              <a:rPr lang="en-US"/>
               <a:t>Fifth level</a:t>
             </a:r>
-            <a:endParaRPr lang="en-US"/>
           </a:p>
         </p:txBody>
       </p:sp>
@@ -817,7 +825,7 @@
           <a:p>
             <a:fld id="{5BCAD085-E8A6-8845-BD4E-CB4CCA059FC4}" type="datetimeFigureOut">
               <a:rPr lang="en-US" smtClean="0"/>
-              <a:t>1/27/13</a:t>
+              <a:t>9/24/2026</a:t>
             </a:fld>
             <a:endParaRPr lang="en-US"/>
           </a:p>
@@ -920,10 +928,9 @@
           </a:lstStyle>
           <a:p>
             <a:r>
-              <a:rPr lang="en-US" smtClean="0"/>
+              <a:rPr lang="en-US"/>
               <a:t>Click to edit Master title style</a:t>
             </a:r>
-            <a:endParaRPr lang="en-US"/>
           </a:p>
         </p:txBody>
       </p:sp>
@@ -1040,7 +1047,7 @@
           <a:p>
             <a:pPr lvl="0"/>
             <a:r>
-              <a:rPr lang="en-US" smtClean="0"/>
+              <a:rPr lang="en-US"/>
               <a:t>Click to edit Master text styles</a:t>
             </a:r>
           </a:p>
@@ -1063,7 +1070,7 @@
           <a:p>
             <a:fld id="{5BCAD085-E8A6-8845-BD4E-CB4CCA059FC4}" type="datetimeFigureOut">
               <a:rPr lang="en-US" smtClean="0"/>
-              <a:t>1/27/13</a:t>
+              <a:t>9/24/2026</a:t>
             </a:fld>
             <a:endParaRPr lang="en-US"/>
           </a:p>
@@ -1157,10 +1164,9 @@
           <a:lstStyle/>
           <a:p>
             <a:r>
-              <a:rPr lang="en-US" smtClean="0"/>
+              <a:rPr lang="en-US"/>
               <a:t>Click to edit Master title style</a:t>
             </a:r>
-            <a:endParaRPr lang="en-US"/>
           </a:p>
         </p:txBody>
       </p:sp>
@@ -1214,38 +1220,37 @@
           <a:p>
             <a:pPr lvl="0"/>
             <a:r>
-              <a:rPr lang="en-US" smtClean="0"/>
+              <a:rPr lang="en-US"/>
               <a:t>Click to edit Master text styles</a:t>
             </a:r>
           </a:p>
           <a:p>
             <a:pPr lvl="1"/>
             <a:r>
-              <a:rPr lang="en-US" smtClean="0"/>
+              <a:rPr lang="en-US"/>
               <a:t>Second level</a:t>
             </a:r>
           </a:p>
           <a:p>
             <a:pPr lvl="2"/>
             <a:r>
-              <a:rPr lang="en-US" smtClean="0"/>
+              <a:rPr lang="en-US"/>
               <a:t>Third level</a:t>
             </a:r>
           </a:p>
           <a:p>
             <a:pPr lvl="3"/>
             <a:r>
-              <a:rPr lang="en-US" smtClean="0"/>
+              <a:rPr lang="en-US"/>
               <a:t>Fourth level</a:t>
             </a:r>
           </a:p>
           <a:p>
             <a:pPr lvl="4"/>
             <a:r>
-              <a:rPr lang="en-US" smtClean="0"/>
+              <a:rPr lang="en-US"/>
               <a:t>Fifth level</a:t>
             </a:r>
-            <a:endParaRPr lang="en-US"/>
           </a:p>
         </p:txBody>
       </p:sp>
@@ -1299,38 +1304,37 @@
           <a:p>
             <a:pPr lvl="0"/>
             <a:r>
-              <a:rPr lang="en-US" smtClean="0"/>
+              <a:rPr lang="en-US"/>
               <a:t>Click to edit Master text styles</a:t>
             </a:r>
           </a:p>
           <a:p>
             <a:pPr lvl="1"/>
             <a:r>
-              <a:rPr lang="en-US" smtClean="0"/>
+              <a:rPr lang="en-US"/>
               <a:t>Second level</a:t>
             </a:r>
           </a:p>
           <a:p>
             <a:pPr lvl="2"/>
             <a:r>
-              <a:rPr lang="en-US" smtClean="0"/>
+              <a:rPr lang="en-US"/>
               <a:t>Third level</a:t>
             </a:r>
           </a:p>
           <a:p>
             <a:pPr lvl="3"/>
             <a:r>
-              <a:rPr lang="en-US" smtClean="0"/>
+              <a:rPr lang="en-US"/>
               <a:t>Fourth level</a:t>
             </a:r>
           </a:p>
           <a:p>
             <a:pPr lvl="4"/>
             <a:r>
-              <a:rPr lang="en-US" smtClean="0"/>
+              <a:rPr lang="en-US"/>
               <a:t>Fifth level</a:t>
             </a:r>
-            <a:endParaRPr lang="en-US"/>
           </a:p>
         </p:txBody>
       </p:sp>
@@ -1351,7 +1355,7 @@
           <a:p>
             <a:fld id="{5BCAD085-E8A6-8845-BD4E-CB4CCA059FC4}" type="datetimeFigureOut">
               <a:rPr lang="en-US" smtClean="0"/>
-              <a:t>1/27/13</a:t>
+              <a:t>9/24/2026</a:t>
             </a:fld>
             <a:endParaRPr lang="en-US"/>
           </a:p>
@@ -1449,10 +1453,9 @@
           </a:lstStyle>
           <a:p>
             <a:r>
-              <a:rPr lang="en-US" smtClean="0"/>
+              <a:rPr lang="en-US"/>
               <a:t>Click to edit Master title style</a:t>
             </a:r>
-            <a:endParaRPr lang="en-US"/>
           </a:p>
         </p:txBody>
       </p:sp>
@@ -1515,7 +1518,7 @@
           <a:p>
             <a:pPr lvl="0"/>
             <a:r>
-              <a:rPr lang="en-US" smtClean="0"/>
+              <a:rPr lang="en-US"/>
               <a:t>Click to edit Master text styles</a:t>
             </a:r>
           </a:p>
@@ -1571,38 +1574,37 @@
           <a:p>
             <a:pPr lvl="0"/>
             <a:r>
-              <a:rPr lang="en-US" smtClean="0"/>
+              <a:rPr lang="en-US"/>
               <a:t>Click to edit Master text styles</a:t>
             </a:r>
           </a:p>
           <a:p>
             <a:pPr lvl="1"/>
             <a:r>
-              <a:rPr lang="en-US" smtClean="0"/>
+              <a:rPr lang="en-US"/>
               <a:t>Second level</a:t>
             </a:r>
           </a:p>
           <a:p>
             <a:pPr lvl="2"/>
             <a:r>
-              <a:rPr lang="en-US" smtClean="0"/>
+              <a:rPr lang="en-US"/>
               <a:t>Third level</a:t>
             </a:r>
           </a:p>
           <a:p>
             <a:pPr lvl="3"/>
             <a:r>
-              <a:rPr lang="en-US" smtClean="0"/>
+              <a:rPr lang="en-US"/>
               <a:t>Fourth level</a:t>
             </a:r>
           </a:p>
           <a:p>
             <a:pPr lvl="4"/>
             <a:r>
-              <a:rPr lang="en-US" smtClean="0"/>
+              <a:rPr lang="en-US"/>
               <a:t>Fifth level</a:t>
             </a:r>
-            <a:endParaRPr lang="en-US"/>
           </a:p>
         </p:txBody>
       </p:sp>
@@ -1665,7 +1667,7 @@
           <a:p>
             <a:pPr lvl="0"/>
             <a:r>
-              <a:rPr lang="en-US" smtClean="0"/>
+              <a:rPr lang="en-US"/>
               <a:t>Click to edit Master text styles</a:t>
             </a:r>
           </a:p>
@@ -1721,38 +1723,37 @@
           <a:p>
             <a:pPr lvl="0"/>
             <a:r>
-              <a:rPr lang="en-US" smtClean="0"/>
+              <a:rPr lang="en-US"/>
               <a:t>Click to edit Master text styles</a:t>
             </a:r>
           </a:p>
           <a:p>
             <a:pPr lvl="1"/>
             <a:r>
-              <a:rPr lang="en-US" smtClean="0"/>
+              <a:rPr lang="en-US"/>
               <a:t>Second level</a:t>
             </a:r>
           </a:p>
           <a:p>
             <a:pPr lvl="2"/>
             <a:r>
-              <a:rPr lang="en-US" smtClean="0"/>
+              <a:rPr lang="en-US"/>
               <a:t>Third level</a:t>
             </a:r>
           </a:p>
           <a:p>
             <a:pPr lvl="3"/>
             <a:r>
-              <a:rPr lang="en-US" smtClean="0"/>
+              <a:rPr lang="en-US"/>
               <a:t>Fourth level</a:t>
             </a:r>
           </a:p>
           <a:p>
             <a:pPr lvl="4"/>
             <a:r>
-              <a:rPr lang="en-US" smtClean="0"/>
+              <a:rPr lang="en-US"/>
               <a:t>Fifth level</a:t>
             </a:r>
-            <a:endParaRPr lang="en-US"/>
           </a:p>
         </p:txBody>
       </p:sp>
@@ -1773,7 +1774,7 @@
           <a:p>
             <a:fld id="{5BCAD085-E8A6-8845-BD4E-CB4CCA059FC4}" type="datetimeFigureOut">
               <a:rPr lang="en-US" smtClean="0"/>
-              <a:t>1/27/13</a:t>
+              <a:t>9/24/2026</a:t>
             </a:fld>
             <a:endParaRPr lang="en-US"/>
           </a:p>
@@ -1867,10 +1868,9 @@
           <a:lstStyle/>
           <a:p>
             <a:r>
-              <a:rPr lang="en-US" smtClean="0"/>
+              <a:rPr lang="en-US"/>
               <a:t>Click to edit Master title style</a:t>
             </a:r>
-            <a:endParaRPr lang="en-US"/>
           </a:p>
         </p:txBody>
       </p:sp>
@@ -1891,7 +1891,7 @@
           <a:p>
             <a:fld id="{5BCAD085-E8A6-8845-BD4E-CB4CCA059FC4}" type="datetimeFigureOut">
               <a:rPr lang="en-US" smtClean="0"/>
-              <a:t>1/27/13</a:t>
+              <a:t>9/24/2026</a:t>
             </a:fld>
             <a:endParaRPr lang="en-US"/>
           </a:p>
@@ -1986,7 +1986,7 @@
           <a:p>
             <a:fld id="{5BCAD085-E8A6-8845-BD4E-CB4CCA059FC4}" type="datetimeFigureOut">
               <a:rPr lang="en-US" smtClean="0"/>
-              <a:t>1/27/13</a:t>
+              <a:t>9/24/2026</a:t>
             </a:fld>
             <a:endParaRPr lang="en-US"/>
           </a:p>
@@ -2089,10 +2089,9 @@
           </a:lstStyle>
           <a:p>
             <a:r>
-              <a:rPr lang="en-US" smtClean="0"/>
+              <a:rPr lang="en-US"/>
               <a:t>Click to edit Master title style</a:t>
             </a:r>
-            <a:endParaRPr lang="en-US"/>
           </a:p>
         </p:txBody>
       </p:sp>
@@ -2146,38 +2145,37 @@
           <a:p>
             <a:pPr lvl="0"/>
             <a:r>
-              <a:rPr lang="en-US" smtClean="0"/>
+              <a:rPr lang="en-US"/>
               <a:t>Click to edit Master text styles</a:t>
             </a:r>
           </a:p>
           <a:p>
             <a:pPr lvl="1"/>
             <a:r>
-              <a:rPr lang="en-US" smtClean="0"/>
+              <a:rPr lang="en-US"/>
               <a:t>Second level</a:t>
             </a:r>
           </a:p>
           <a:p>
             <a:pPr lvl="2"/>
             <a:r>
-              <a:rPr lang="en-US" smtClean="0"/>
+              <a:rPr lang="en-US"/>
               <a:t>Third level</a:t>
             </a:r>
           </a:p>
           <a:p>
             <a:pPr lvl="3"/>
             <a:r>
-              <a:rPr lang="en-US" smtClean="0"/>
+              <a:rPr lang="en-US"/>
               <a:t>Fourth level</a:t>
             </a:r>
           </a:p>
           <a:p>
             <a:pPr lvl="4"/>
             <a:r>
-              <a:rPr lang="en-US" smtClean="0"/>
+              <a:rPr lang="en-US"/>
               <a:t>Fifth level</a:t>
             </a:r>
-            <a:endParaRPr lang="en-US"/>
           </a:p>
         </p:txBody>
       </p:sp>
@@ -2240,7 +2238,7 @@
           <a:p>
             <a:pPr lvl="0"/>
             <a:r>
-              <a:rPr lang="en-US" smtClean="0"/>
+              <a:rPr lang="en-US"/>
               <a:t>Click to edit Master text styles</a:t>
             </a:r>
           </a:p>
@@ -2263,7 +2261,7 @@
           <a:p>
             <a:fld id="{5BCAD085-E8A6-8845-BD4E-CB4CCA059FC4}" type="datetimeFigureOut">
               <a:rPr lang="en-US" smtClean="0"/>
-              <a:t>1/27/13</a:t>
+              <a:t>9/24/2026</a:t>
             </a:fld>
             <a:endParaRPr lang="en-US"/>
           </a:p>
@@ -2366,10 +2364,9 @@
           </a:lstStyle>
           <a:p>
             <a:r>
-              <a:rPr lang="en-US" smtClean="0"/>
+              <a:rPr lang="en-US"/>
               <a:t>Click to edit Master title style</a:t>
             </a:r>
-            <a:endParaRPr lang="en-US"/>
           </a:p>
         </p:txBody>
       </p:sp>
@@ -2493,7 +2490,7 @@
           <a:p>
             <a:pPr lvl="0"/>
             <a:r>
-              <a:rPr lang="en-US" smtClean="0"/>
+              <a:rPr lang="en-US"/>
               <a:t>Click to edit Master text styles</a:t>
             </a:r>
           </a:p>
@@ -2516,7 +2513,7 @@
           <a:p>
             <a:fld id="{5BCAD085-E8A6-8845-BD4E-CB4CCA059FC4}" type="datetimeFigureOut">
               <a:rPr lang="en-US" smtClean="0"/>
-              <a:t>1/27/13</a:t>
+              <a:t>9/24/2026</a:t>
             </a:fld>
             <a:endParaRPr lang="en-US"/>
           </a:p>
@@ -2625,10 +2622,9 @@
           <a:lstStyle/>
           <a:p>
             <a:r>
-              <a:rPr lang="en-US" smtClean="0"/>
+              <a:rPr lang="en-US"/>
               <a:t>Click to edit Master title style</a:t>
             </a:r>
-            <a:endParaRPr lang="en-US"/>
           </a:p>
         </p:txBody>
       </p:sp>
@@ -2659,38 +2655,37 @@
           <a:p>
             <a:pPr lvl="0"/>
             <a:r>
-              <a:rPr lang="en-US" smtClean="0"/>
+              <a:rPr lang="en-US"/>
               <a:t>Click to edit Master text styles</a:t>
             </a:r>
           </a:p>
           <a:p>
             <a:pPr lvl="1"/>
             <a:r>
-              <a:rPr lang="en-US" smtClean="0"/>
+              <a:rPr lang="en-US"/>
               <a:t>Second level</a:t>
             </a:r>
           </a:p>
           <a:p>
             <a:pPr lvl="2"/>
             <a:r>
-              <a:rPr lang="en-US" smtClean="0"/>
+              <a:rPr lang="en-US"/>
               <a:t>Third level</a:t>
             </a:r>
           </a:p>
           <a:p>
             <a:pPr lvl="3"/>
             <a:r>
-              <a:rPr lang="en-US" smtClean="0"/>
+              <a:rPr lang="en-US"/>
               <a:t>Fourth level</a:t>
             </a:r>
           </a:p>
           <a:p>
             <a:pPr lvl="4"/>
             <a:r>
-              <a:rPr lang="en-US" smtClean="0"/>
+              <a:rPr lang="en-US"/>
               <a:t>Fifth level</a:t>
             </a:r>
-            <a:endParaRPr lang="en-US"/>
           </a:p>
         </p:txBody>
       </p:sp>
@@ -2729,7 +2724,7 @@
           <a:p>
             <a:fld id="{5BCAD085-E8A6-8845-BD4E-CB4CCA059FC4}" type="datetimeFigureOut">
               <a:rPr lang="en-US" smtClean="0"/>
-              <a:t>1/27/13</a:t>
+              <a:t>9/24/2026</a:t>
             </a:fld>
             <a:endParaRPr lang="en-US"/>
           </a:p>
@@ -3088,7 +3083,7 @@
 </file>
 
 <file path=ppt/slides/slide1.xml><?xml version="1.0" encoding="utf-8"?>
-<p:sld xmlns:a="http://schemas.openxmlformats.org/drawingml/2006/main" xmlns:p="http://schemas.openxmlformats.org/presentationml/2006/main" xmlns:r="http://schemas.openxmlformats.org/officeDocument/2006/relationships">
+<p:sld xmlns:a="http://schemas.openxmlformats.org/drawingml/2006/main" xmlns:r="http://schemas.openxmlformats.org/officeDocument/2006/relationships" xmlns:p="http://schemas.openxmlformats.org/presentationml/2006/main">
   <p:cSld>
     <p:spTree>
       <p:nvGrpSpPr>
@@ -3096,7 +3091,14 @@
         <p:cNvGrpSpPr/>
         <p:nvPr/>
       </p:nvGrpSpPr>
-      <p:grpSpPr/>
+      <p:grpSpPr>
+        <a:xfrm>
+          <a:off x="0" y="0"/>
+          <a:ext cx="0" cy="0"/>
+          <a:chOff x="0" y="0"/>
+          <a:chExt cx="0" cy="0"/>
+        </a:xfrm>
+      </p:grpSpPr>
       <p:sp>
         <p:nvSpPr>
           <p:cNvPr id="2" name="Rectangle 1"/>
@@ -3137,6 +3139,7 @@
           <a:lstStyle/>
           <a:p>
             <a:pPr algn="ctr"/>
+            <a:endParaRPr/>
           </a:p>
         </p:txBody>
       </p:sp>
@@ -3178,7 +3181,7 @@
           </a:fontRef>
         </p:style>
         <p:txBody>
-          <a:bodyPr rtlCol="0" anchor="ctr" wrap="square"/>
+          <a:bodyPr wrap="square" rtlCol="0" anchor="ctr"/>
           <a:lstStyle/>
           <a:p>
             <a:pPr algn="ctr">
@@ -3233,7 +3236,7 @@
 </file>
 
 <file path=ppt/slides/slide10.xml><?xml version="1.0" encoding="utf-8"?>
-<p:sld xmlns:a="http://schemas.openxmlformats.org/drawingml/2006/main" xmlns:p="http://schemas.openxmlformats.org/presentationml/2006/main" xmlns:r="http://schemas.openxmlformats.org/officeDocument/2006/relationships">
+<p:sld xmlns:a="http://schemas.openxmlformats.org/drawingml/2006/main" xmlns:r="http://schemas.openxmlformats.org/officeDocument/2006/relationships" xmlns:p="http://schemas.openxmlformats.org/presentationml/2006/main">
   <p:cSld>
     <p:spTree>
       <p:nvGrpSpPr>
@@ -3241,7 +3244,14 @@
         <p:cNvGrpSpPr/>
         <p:nvPr/>
       </p:nvGrpSpPr>
-      <p:grpSpPr/>
+      <p:grpSpPr>
+        <a:xfrm>
+          <a:off x="0" y="0"/>
+          <a:ext cx="0" cy="0"/>
+          <a:chOff x="0" y="0"/>
+          <a:chExt cx="0" cy="0"/>
+        </a:xfrm>
+      </p:grpSpPr>
       <p:sp>
         <p:nvSpPr>
           <p:cNvPr id="2" name="Rectangle 1"/>
@@ -3282,6 +3292,7 @@
           <a:lstStyle/>
           <a:p>
             <a:pPr algn="ctr"/>
+            <a:endParaRPr/>
           </a:p>
         </p:txBody>
       </p:sp>
@@ -3323,7 +3334,7 @@
           </a:fontRef>
         </p:style>
         <p:txBody>
-          <a:bodyPr rtlCol="0" anchor="ctr" wrap="square"/>
+          <a:bodyPr wrap="square" rtlCol="0" anchor="ctr"/>
           <a:lstStyle/>
           <a:p>
             <a:pPr algn="ctr">
@@ -3378,7 +3389,7 @@
 </file>
 
 <file path=ppt/slides/slide2.xml><?xml version="1.0" encoding="utf-8"?>
-<p:sld xmlns:a="http://schemas.openxmlformats.org/drawingml/2006/main" xmlns:p="http://schemas.openxmlformats.org/presentationml/2006/main" xmlns:r="http://schemas.openxmlformats.org/officeDocument/2006/relationships">
+<p:sld xmlns:a="http://schemas.openxmlformats.org/drawingml/2006/main" xmlns:r="http://schemas.openxmlformats.org/officeDocument/2006/relationships" xmlns:p="http://schemas.openxmlformats.org/presentationml/2006/main">
   <p:cSld>
     <p:spTree>
       <p:nvGrpSpPr>
@@ -3386,7 +3397,14 @@
         <p:cNvGrpSpPr/>
         <p:nvPr/>
       </p:nvGrpSpPr>
-      <p:grpSpPr/>
+      <p:grpSpPr>
+        <a:xfrm>
+          <a:off x="0" y="0"/>
+          <a:ext cx="0" cy="0"/>
+          <a:chOff x="0" y="0"/>
+          <a:chExt cx="0" cy="0"/>
+        </a:xfrm>
+      </p:grpSpPr>
       <p:sp>
         <p:nvSpPr>
           <p:cNvPr id="2" name="Rectangle 1"/>
@@ -3427,6 +3445,7 @@
           <a:lstStyle/>
           <a:p>
             <a:pPr algn="ctr"/>
+            <a:endParaRPr/>
           </a:p>
         </p:txBody>
       </p:sp>
@@ -3538,7 +3557,7 @@
           </a:fontRef>
         </p:style>
         <p:txBody>
-          <a:bodyPr rtlCol="0" anchor="ctr" wrap="square"/>
+          <a:bodyPr wrap="square" rtlCol="0" anchor="ctr"/>
           <a:lstStyle/>
           <a:p>
             <a:pPr algn="ctr">
@@ -3607,7 +3626,7 @@
           </a:fontRef>
         </p:style>
         <p:txBody>
-          <a:bodyPr rtlCol="0" anchor="ctr" wrap="square"/>
+          <a:bodyPr wrap="square" rtlCol="0" anchor="ctr"/>
           <a:lstStyle/>
           <a:p>
             <a:pPr algn="ctr">
@@ -3676,7 +3695,7 @@
           </a:fontRef>
         </p:style>
         <p:txBody>
-          <a:bodyPr rtlCol="0" anchor="ctr" wrap="square"/>
+          <a:bodyPr wrap="square" rtlCol="0" anchor="ctr"/>
           <a:lstStyle/>
           <a:p>
             <a:pPr algn="ctr">
@@ -3745,7 +3764,7 @@
           </a:fontRef>
         </p:style>
         <p:txBody>
-          <a:bodyPr rtlCol="0" anchor="ctr" wrap="square"/>
+          <a:bodyPr wrap="square" rtlCol="0" anchor="ctr"/>
           <a:lstStyle/>
           <a:p>
             <a:pPr algn="ctr">
@@ -3785,7 +3804,7 @@
 </file>
 
 <file path=ppt/slides/slide3.xml><?xml version="1.0" encoding="utf-8"?>
-<p:sld xmlns:a="http://schemas.openxmlformats.org/drawingml/2006/main" xmlns:p="http://schemas.openxmlformats.org/presentationml/2006/main" xmlns:r="http://schemas.openxmlformats.org/officeDocument/2006/relationships">
+<p:sld xmlns:a="http://schemas.openxmlformats.org/drawingml/2006/main" xmlns:r="http://schemas.openxmlformats.org/officeDocument/2006/relationships" xmlns:p="http://schemas.openxmlformats.org/presentationml/2006/main">
   <p:cSld>
     <p:spTree>
       <p:nvGrpSpPr>
@@ -3793,7 +3812,14 @@
         <p:cNvGrpSpPr/>
         <p:nvPr/>
       </p:nvGrpSpPr>
-      <p:grpSpPr/>
+      <p:grpSpPr>
+        <a:xfrm>
+          <a:off x="0" y="0"/>
+          <a:ext cx="0" cy="0"/>
+          <a:chOff x="0" y="0"/>
+          <a:chExt cx="0" cy="0"/>
+        </a:xfrm>
+      </p:grpSpPr>
       <p:sp>
         <p:nvSpPr>
           <p:cNvPr id="2" name="Rectangle 1"/>
@@ -3834,6 +3860,7 @@
           <a:lstStyle/>
           <a:p>
             <a:pPr algn="ctr"/>
+            <a:endParaRPr/>
           </a:p>
         </p:txBody>
       </p:sp>
@@ -3945,7 +3972,7 @@
           </a:fontRef>
         </p:style>
         <p:txBody>
-          <a:bodyPr rtlCol="0" anchor="ctr" wrap="square"/>
+          <a:bodyPr wrap="square" rtlCol="0" anchor="ctr"/>
           <a:lstStyle/>
           <a:p>
             <a:pPr algn="ctr">
@@ -4014,7 +4041,7 @@
           </a:fontRef>
         </p:style>
         <p:txBody>
-          <a:bodyPr rtlCol="0" anchor="ctr" wrap="square"/>
+          <a:bodyPr wrap="square" rtlCol="0" anchor="ctr"/>
           <a:lstStyle/>
           <a:p>
             <a:pPr algn="ctr">
@@ -4083,7 +4110,7 @@
           </a:fontRef>
         </p:style>
         <p:txBody>
-          <a:bodyPr rtlCol="0" anchor="ctr" wrap="square"/>
+          <a:bodyPr wrap="square" rtlCol="0" anchor="ctr"/>
           <a:lstStyle/>
           <a:p>
             <a:pPr algn="ctr">
@@ -4152,7 +4179,7 @@
           </a:fontRef>
         </p:style>
         <p:txBody>
-          <a:bodyPr rtlCol="0" anchor="ctr" wrap="square"/>
+          <a:bodyPr wrap="square" rtlCol="0" anchor="ctr"/>
           <a:lstStyle/>
           <a:p>
             <a:pPr algn="ctr">
@@ -4221,7 +4248,7 @@
           </a:fontRef>
         </p:style>
         <p:txBody>
-          <a:bodyPr rtlCol="0" anchor="ctr" wrap="square"/>
+          <a:bodyPr wrap="square" rtlCol="0" anchor="ctr"/>
           <a:lstStyle/>
           <a:p>
             <a:pPr algn="ctr">
@@ -4290,7 +4317,7 @@
           </a:fontRef>
         </p:style>
         <p:txBody>
-          <a:bodyPr rtlCol="0" anchor="ctr" wrap="square"/>
+          <a:bodyPr wrap="square" rtlCol="0" anchor="ctr"/>
           <a:lstStyle/>
           <a:p>
             <a:pPr algn="ctr">
@@ -4330,7 +4357,7 @@
 </file>
 
 <file path=ppt/slides/slide4.xml><?xml version="1.0" encoding="utf-8"?>
-<p:sld xmlns:a="http://schemas.openxmlformats.org/drawingml/2006/main" xmlns:p="http://schemas.openxmlformats.org/presentationml/2006/main" xmlns:r="http://schemas.openxmlformats.org/officeDocument/2006/relationships">
+<p:sld xmlns:a="http://schemas.openxmlformats.org/drawingml/2006/main" xmlns:r="http://schemas.openxmlformats.org/officeDocument/2006/relationships" xmlns:p="http://schemas.openxmlformats.org/presentationml/2006/main">
   <p:cSld>
     <p:spTree>
       <p:nvGrpSpPr>
@@ -4338,7 +4365,14 @@
         <p:cNvGrpSpPr/>
         <p:nvPr/>
       </p:nvGrpSpPr>
-      <p:grpSpPr/>
+      <p:grpSpPr>
+        <a:xfrm>
+          <a:off x="0" y="0"/>
+          <a:ext cx="0" cy="0"/>
+          <a:chOff x="0" y="0"/>
+          <a:chExt cx="0" cy="0"/>
+        </a:xfrm>
+      </p:grpSpPr>
       <p:sp>
         <p:nvSpPr>
           <p:cNvPr id="2" name="Rectangle 1"/>
@@ -4379,6 +4413,7 @@
           <a:lstStyle/>
           <a:p>
             <a:pPr algn="ctr"/>
+            <a:endParaRPr/>
           </a:p>
         </p:txBody>
       </p:sp>
@@ -4490,7 +4525,7 @@
           </a:fontRef>
         </p:style>
         <p:txBody>
-          <a:bodyPr rtlCol="0" anchor="ctr" wrap="square"/>
+          <a:bodyPr wrap="square" rtlCol="0" anchor="ctr"/>
           <a:lstStyle/>
           <a:p>
             <a:pPr algn="ctr">
@@ -4559,7 +4594,7 @@
           </a:fontRef>
         </p:style>
         <p:txBody>
-          <a:bodyPr rtlCol="0" anchor="ctr" wrap="square"/>
+          <a:bodyPr wrap="square" rtlCol="0" anchor="ctr"/>
           <a:lstStyle/>
           <a:p>
             <a:pPr algn="ctr">
@@ -4618,7 +4653,7 @@
 </file>
 
 <file path=ppt/slides/slide5.xml><?xml version="1.0" encoding="utf-8"?>
-<p:sld xmlns:a="http://schemas.openxmlformats.org/drawingml/2006/main" xmlns:p="http://schemas.openxmlformats.org/presentationml/2006/main" xmlns:r="http://schemas.openxmlformats.org/officeDocument/2006/relationships">
+<p:sld xmlns:a="http://schemas.openxmlformats.org/drawingml/2006/main" xmlns:r="http://schemas.openxmlformats.org/officeDocument/2006/relationships" xmlns:p="http://schemas.openxmlformats.org/presentationml/2006/main">
   <p:cSld>
     <p:spTree>
       <p:nvGrpSpPr>
@@ -4626,7 +4661,14 @@
         <p:cNvGrpSpPr/>
         <p:nvPr/>
       </p:nvGrpSpPr>
-      <p:grpSpPr/>
+      <p:grpSpPr>
+        <a:xfrm>
+          <a:off x="0" y="0"/>
+          <a:ext cx="0" cy="0"/>
+          <a:chOff x="0" y="0"/>
+          <a:chExt cx="0" cy="0"/>
+        </a:xfrm>
+      </p:grpSpPr>
       <p:sp>
         <p:nvSpPr>
           <p:cNvPr id="2" name="Rectangle 1"/>
@@ -4667,6 +4709,7 @@
           <a:lstStyle/>
           <a:p>
             <a:pPr algn="ctr"/>
+            <a:endParaRPr/>
           </a:p>
         </p:txBody>
       </p:sp>
@@ -4778,7 +4821,7 @@
           </a:fontRef>
         </p:style>
         <p:txBody>
-          <a:bodyPr rtlCol="0" anchor="ctr" wrap="square"/>
+          <a:bodyPr wrap="square" rtlCol="0" anchor="ctr"/>
           <a:lstStyle/>
           <a:p>
             <a:pPr algn="ctr">
@@ -4870,7 +4913,7 @@
           </a:fontRef>
         </p:style>
         <p:txBody>
-          <a:bodyPr rtlCol="0" anchor="ctr" wrap="square"/>
+          <a:bodyPr wrap="square" rtlCol="0" anchor="ctr"/>
           <a:lstStyle/>
           <a:p>
             <a:pPr algn="ctr">
@@ -4933,7 +4976,7 @@
 </file>
 
 <file path=ppt/slides/slide6.xml><?xml version="1.0" encoding="utf-8"?>
-<p:sld xmlns:a="http://schemas.openxmlformats.org/drawingml/2006/main" xmlns:p="http://schemas.openxmlformats.org/presentationml/2006/main" xmlns:r="http://schemas.openxmlformats.org/officeDocument/2006/relationships">
+<p:sld xmlns:a="http://schemas.openxmlformats.org/drawingml/2006/main" xmlns:r="http://schemas.openxmlformats.org/officeDocument/2006/relationships" xmlns:p="http://schemas.openxmlformats.org/presentationml/2006/main">
   <p:cSld>
     <p:spTree>
       <p:nvGrpSpPr>
@@ -4941,7 +4984,14 @@
         <p:cNvGrpSpPr/>
         <p:nvPr/>
       </p:nvGrpSpPr>
-      <p:grpSpPr/>
+      <p:grpSpPr>
+        <a:xfrm>
+          <a:off x="0" y="0"/>
+          <a:ext cx="0" cy="0"/>
+          <a:chOff x="0" y="0"/>
+          <a:chExt cx="0" cy="0"/>
+        </a:xfrm>
+      </p:grpSpPr>
       <p:sp>
         <p:nvSpPr>
           <p:cNvPr id="2" name="Rectangle 1"/>
@@ -4982,6 +5032,7 @@
           <a:lstStyle/>
           <a:p>
             <a:pPr algn="ctr"/>
+            <a:endParaRPr/>
           </a:p>
         </p:txBody>
       </p:sp>
@@ -5093,7 +5144,7 @@
           </a:fontRef>
         </p:style>
         <p:txBody>
-          <a:bodyPr rtlCol="0" anchor="ctr" wrap="square"/>
+          <a:bodyPr wrap="square" rtlCol="0" anchor="ctr"/>
           <a:lstStyle/>
           <a:p>
             <a:pPr algn="ctr">
@@ -5162,7 +5213,7 @@
           </a:fontRef>
         </p:style>
         <p:txBody>
-          <a:bodyPr rtlCol="0" anchor="ctr" wrap="square"/>
+          <a:bodyPr wrap="square" rtlCol="0" anchor="ctr"/>
           <a:lstStyle/>
           <a:p>
             <a:pPr algn="ctr">
@@ -5231,7 +5282,7 @@
           </a:fontRef>
         </p:style>
         <p:txBody>
-          <a:bodyPr rtlCol="0" anchor="ctr" wrap="square"/>
+          <a:bodyPr wrap="square" rtlCol="0" anchor="ctr"/>
           <a:lstStyle/>
           <a:p>
             <a:pPr algn="ctr">
@@ -5271,7 +5322,7 @@
 </file>
 
 <file path=ppt/slides/slide7.xml><?xml version="1.0" encoding="utf-8"?>
-<p:sld xmlns:a="http://schemas.openxmlformats.org/drawingml/2006/main" xmlns:p="http://schemas.openxmlformats.org/presentationml/2006/main" xmlns:r="http://schemas.openxmlformats.org/officeDocument/2006/relationships">
+<p:sld xmlns:a="http://schemas.openxmlformats.org/drawingml/2006/main" xmlns:r="http://schemas.openxmlformats.org/officeDocument/2006/relationships" xmlns:p="http://schemas.openxmlformats.org/presentationml/2006/main">
   <p:cSld>
     <p:spTree>
       <p:nvGrpSpPr>
@@ -5279,7 +5330,14 @@
         <p:cNvGrpSpPr/>
         <p:nvPr/>
       </p:nvGrpSpPr>
-      <p:grpSpPr/>
+      <p:grpSpPr>
+        <a:xfrm>
+          <a:off x="0" y="0"/>
+          <a:ext cx="0" cy="0"/>
+          <a:chOff x="0" y="0"/>
+          <a:chExt cx="0" cy="0"/>
+        </a:xfrm>
+      </p:grpSpPr>
       <p:sp>
         <p:nvSpPr>
           <p:cNvPr id="2" name="Rectangle 1"/>
@@ -5320,6 +5378,7 @@
           <a:lstStyle/>
           <a:p>
             <a:pPr algn="ctr"/>
+            <a:endParaRPr/>
           </a:p>
         </p:txBody>
       </p:sp>
@@ -5431,7 +5490,7 @@
           </a:fontRef>
         </p:style>
         <p:txBody>
-          <a:bodyPr rtlCol="0" anchor="ctr" wrap="square"/>
+          <a:bodyPr wrap="square" rtlCol="0" anchor="ctr"/>
           <a:lstStyle/>
           <a:p>
             <a:pPr algn="ctr">
@@ -5508,7 +5567,7 @@
           </a:fontRef>
         </p:style>
         <p:txBody>
-          <a:bodyPr rtlCol="0" anchor="ctr" wrap="square"/>
+          <a:bodyPr wrap="square" rtlCol="0" anchor="ctr"/>
           <a:lstStyle/>
           <a:p>
             <a:pPr algn="ctr">
@@ -5556,7 +5615,7 @@
 </file>
 
 <file path=ppt/slides/slide8.xml><?xml version="1.0" encoding="utf-8"?>
-<p:sld xmlns:a="http://schemas.openxmlformats.org/drawingml/2006/main" xmlns:p="http://schemas.openxmlformats.org/presentationml/2006/main" xmlns:r="http://schemas.openxmlformats.org/officeDocument/2006/relationships">
+<p:sld xmlns:a="http://schemas.openxmlformats.org/drawingml/2006/main" xmlns:r="http://schemas.openxmlformats.org/officeDocument/2006/relationships" xmlns:p="http://schemas.openxmlformats.org/presentationml/2006/main">
   <p:cSld>
     <p:spTree>
       <p:nvGrpSpPr>
@@ -5564,7 +5623,14 @@
         <p:cNvGrpSpPr/>
         <p:nvPr/>
       </p:nvGrpSpPr>
-      <p:grpSpPr/>
+      <p:grpSpPr>
+        <a:xfrm>
+          <a:off x="0" y="0"/>
+          <a:ext cx="0" cy="0"/>
+          <a:chOff x="0" y="0"/>
+          <a:chExt cx="0" cy="0"/>
+        </a:xfrm>
+      </p:grpSpPr>
       <p:sp>
         <p:nvSpPr>
           <p:cNvPr id="2" name="Rectangle 1"/>
@@ -5605,6 +5671,7 @@
           <a:lstStyle/>
           <a:p>
             <a:pPr algn="ctr"/>
+            <a:endParaRPr/>
           </a:p>
         </p:txBody>
       </p:sp>
@@ -5716,7 +5783,7 @@
           </a:fontRef>
         </p:style>
         <p:txBody>
-          <a:bodyPr rtlCol="0" anchor="ctr" wrap="square"/>
+          <a:bodyPr wrap="square" rtlCol="0" anchor="ctr"/>
           <a:lstStyle/>
           <a:p>
             <a:pPr algn="ctr">
@@ -5793,7 +5860,7 @@
           </a:fontRef>
         </p:style>
         <p:txBody>
-          <a:bodyPr rtlCol="0" anchor="ctr" wrap="square"/>
+          <a:bodyPr wrap="square" rtlCol="0" anchor="ctr"/>
           <a:lstStyle/>
           <a:p>
             <a:pPr algn="ctr">
@@ -5841,7 +5908,7 @@
 </file>
 
 <file path=ppt/slides/slide9.xml><?xml version="1.0" encoding="utf-8"?>
-<p:sld xmlns:a="http://schemas.openxmlformats.org/drawingml/2006/main" xmlns:p="http://schemas.openxmlformats.org/presentationml/2006/main" xmlns:r="http://schemas.openxmlformats.org/officeDocument/2006/relationships">
+<p:sld xmlns:a="http://schemas.openxmlformats.org/drawingml/2006/main" xmlns:r="http://schemas.openxmlformats.org/officeDocument/2006/relationships" xmlns:p="http://schemas.openxmlformats.org/presentationml/2006/main">
   <p:cSld>
     <p:spTree>
       <p:nvGrpSpPr>
@@ -5849,7 +5916,14 @@
         <p:cNvGrpSpPr/>
         <p:nvPr/>
       </p:nvGrpSpPr>
-      <p:grpSpPr/>
+      <p:grpSpPr>
+        <a:xfrm>
+          <a:off x="0" y="0"/>
+          <a:ext cx="0" cy="0"/>
+          <a:chOff x="0" y="0"/>
+          <a:chExt cx="0" cy="0"/>
+        </a:xfrm>
+      </p:grpSpPr>
       <p:sp>
         <p:nvSpPr>
           <p:cNvPr id="2" name="Rectangle 1"/>
@@ -5890,6 +5964,7 @@
           <a:lstStyle/>
           <a:p>
             <a:pPr algn="ctr"/>
+            <a:endParaRPr/>
           </a:p>
         </p:txBody>
       </p:sp>
@@ -6001,7 +6076,7 @@
           </a:fontRef>
         </p:style>
         <p:txBody>
-          <a:bodyPr rtlCol="0" anchor="ctr" wrap="square"/>
+          <a:bodyPr wrap="square" rtlCol="0" anchor="ctr"/>
           <a:lstStyle/>
           <a:p>
             <a:pPr algn="ctr">

--- a/EduFund_Pitch_Deck_v2.pptx
+++ b/EduFund_Pitch_Deck_v2.pptx
@@ -5,18 +5,18 @@
     <p:sldMasterId id="2147483648" r:id="rId1"/>
   </p:sldMasterIdLst>
   <p:sldIdLst>
-    <p:sldId id="256" r:id="rId2"/>
-    <p:sldId id="257" r:id="rId3"/>
-    <p:sldId id="258" r:id="rId4"/>
-    <p:sldId id="259" r:id="rId5"/>
-    <p:sldId id="260" r:id="rId6"/>
-    <p:sldId id="261" r:id="rId7"/>
-    <p:sldId id="262" r:id="rId8"/>
-    <p:sldId id="263" r:id="rId9"/>
-    <p:sldId id="264" r:id="rId10"/>
-    <p:sldId id="265" r:id="rId11"/>
+    <p:sldId id="256" r:id="rId7"/>
+    <p:sldId id="257" r:id="rId8"/>
+    <p:sldId id="258" r:id="rId9"/>
+    <p:sldId id="259" r:id="rId10"/>
+    <p:sldId id="260" r:id="rId11"/>
+    <p:sldId id="261" r:id="rId12"/>
+    <p:sldId id="262" r:id="rId13"/>
+    <p:sldId id="263" r:id="rId14"/>
+    <p:sldId id="264" r:id="rId15"/>
+    <p:sldId id="265" r:id="rId16"/>
   </p:sldIdLst>
-  <p:sldSz cx="12192000" cy="6858000"/>
+  <p:sldSz cx="12191695" cy="6858000" type="screen4x3"/>
   <p:notesSz cx="6858000" cy="9144000"/>
   <p:defaultTextStyle>
     <a:defPPr>
@@ -113,22 +113,6 @@
       </a:defRPr>
     </a:lvl9pPr>
   </p:defaultTextStyle>
-  <p:extLst>
-    <p:ext uri="{EFAFB233-063F-42B5-8137-9DF3F51BA10A}">
-      <p15:sldGuideLst xmlns:p15="http://schemas.microsoft.com/office/powerpoint/2012/main">
-        <p15:guide id="1" orient="horz" pos="2160">
-          <p15:clr>
-            <a:srgbClr val="A4A3A4"/>
-          </p15:clr>
-        </p15:guide>
-        <p15:guide id="2" pos="2880">
-          <p15:clr>
-            <a:srgbClr val="A4A3A4"/>
-          </p15:clr>
-        </p15:guide>
-      </p15:sldGuideLst>
-    </p:ext>
-  </p:extLst>
 </p:presentation>
 </file>
 
@@ -170,9 +154,10 @@
           <a:lstStyle/>
           <a:p>
             <a:r>
-              <a:rPr lang="en-US"/>
+              <a:rPr lang="en-US" smtClean="0"/>
               <a:t>Click to edit Master title style</a:t>
             </a:r>
+            <a:endParaRPr lang="en-US"/>
           </a:p>
         </p:txBody>
       </p:sp>
@@ -288,9 +273,10 @@
           </a:lstStyle>
           <a:p>
             <a:r>
-              <a:rPr lang="en-US"/>
+              <a:rPr lang="en-US" smtClean="0"/>
               <a:t>Click to edit Master subtitle style</a:t>
             </a:r>
+            <a:endParaRPr lang="en-US"/>
           </a:p>
         </p:txBody>
       </p:sp>
@@ -311,7 +297,7 @@
           <a:p>
             <a:fld id="{5BCAD085-E8A6-8845-BD4E-CB4CCA059FC4}" type="datetimeFigureOut">
               <a:rPr lang="en-US" smtClean="0"/>
-              <a:t>9/24/2026</a:t>
+              <a:t>1/27/13</a:t>
             </a:fld>
             <a:endParaRPr lang="en-US"/>
           </a:p>
@@ -405,9 +391,10 @@
           <a:lstStyle/>
           <a:p>
             <a:r>
-              <a:rPr lang="en-US"/>
+              <a:rPr lang="en-US" smtClean="0"/>
               <a:t>Click to edit Master title style</a:t>
             </a:r>
+            <a:endParaRPr lang="en-US"/>
           </a:p>
         </p:txBody>
       </p:sp>
@@ -428,37 +415,38 @@
           <a:p>
             <a:pPr lvl="0"/>
             <a:r>
-              <a:rPr lang="en-US"/>
+              <a:rPr lang="en-US" smtClean="0"/>
               <a:t>Click to edit Master text styles</a:t>
             </a:r>
           </a:p>
           <a:p>
             <a:pPr lvl="1"/>
             <a:r>
-              <a:rPr lang="en-US"/>
+              <a:rPr lang="en-US" smtClean="0"/>
               <a:t>Second level</a:t>
             </a:r>
           </a:p>
           <a:p>
             <a:pPr lvl="2"/>
             <a:r>
-              <a:rPr lang="en-US"/>
+              <a:rPr lang="en-US" smtClean="0"/>
               <a:t>Third level</a:t>
             </a:r>
           </a:p>
           <a:p>
             <a:pPr lvl="3"/>
             <a:r>
-              <a:rPr lang="en-US"/>
+              <a:rPr lang="en-US" smtClean="0"/>
               <a:t>Fourth level</a:t>
             </a:r>
           </a:p>
           <a:p>
             <a:pPr lvl="4"/>
             <a:r>
-              <a:rPr lang="en-US"/>
+              <a:rPr lang="en-US" smtClean="0"/>
               <a:t>Fifth level</a:t>
             </a:r>
+            <a:endParaRPr lang="en-US"/>
           </a:p>
         </p:txBody>
       </p:sp>
@@ -479,7 +467,7 @@
           <a:p>
             <a:fld id="{5BCAD085-E8A6-8845-BD4E-CB4CCA059FC4}" type="datetimeFigureOut">
               <a:rPr lang="en-US" smtClean="0"/>
-              <a:t>9/24/2026</a:t>
+              <a:t>1/27/13</a:t>
             </a:fld>
             <a:endParaRPr lang="en-US"/>
           </a:p>
@@ -578,9 +566,10 @@
           <a:lstStyle/>
           <a:p>
             <a:r>
-              <a:rPr lang="en-US"/>
+              <a:rPr lang="en-US" smtClean="0"/>
               <a:t>Click to edit Master title style</a:t>
             </a:r>
+            <a:endParaRPr lang="en-US"/>
           </a:p>
         </p:txBody>
       </p:sp>
@@ -606,37 +595,38 @@
           <a:p>
             <a:pPr lvl="0"/>
             <a:r>
-              <a:rPr lang="en-US"/>
+              <a:rPr lang="en-US" smtClean="0"/>
               <a:t>Click to edit Master text styles</a:t>
             </a:r>
           </a:p>
           <a:p>
             <a:pPr lvl="1"/>
             <a:r>
-              <a:rPr lang="en-US"/>
+              <a:rPr lang="en-US" smtClean="0"/>
               <a:t>Second level</a:t>
             </a:r>
           </a:p>
           <a:p>
             <a:pPr lvl="2"/>
             <a:r>
-              <a:rPr lang="en-US"/>
+              <a:rPr lang="en-US" smtClean="0"/>
               <a:t>Third level</a:t>
             </a:r>
           </a:p>
           <a:p>
             <a:pPr lvl="3"/>
             <a:r>
-              <a:rPr lang="en-US"/>
+              <a:rPr lang="en-US" smtClean="0"/>
               <a:t>Fourth level</a:t>
             </a:r>
           </a:p>
           <a:p>
             <a:pPr lvl="4"/>
             <a:r>
-              <a:rPr lang="en-US"/>
+              <a:rPr lang="en-US" smtClean="0"/>
               <a:t>Fifth level</a:t>
             </a:r>
+            <a:endParaRPr lang="en-US"/>
           </a:p>
         </p:txBody>
       </p:sp>
@@ -657,7 +647,7 @@
           <a:p>
             <a:fld id="{5BCAD085-E8A6-8845-BD4E-CB4CCA059FC4}" type="datetimeFigureOut">
               <a:rPr lang="en-US" smtClean="0"/>
-              <a:t>9/24/2026</a:t>
+              <a:t>1/27/13</a:t>
             </a:fld>
             <a:endParaRPr lang="en-US"/>
           </a:p>
@@ -751,9 +741,10 @@
           <a:lstStyle/>
           <a:p>
             <a:r>
-              <a:rPr lang="en-US"/>
+              <a:rPr lang="en-US" smtClean="0"/>
               <a:t>Click to edit Master title style</a:t>
             </a:r>
+            <a:endParaRPr lang="en-US"/>
           </a:p>
         </p:txBody>
       </p:sp>
@@ -774,37 +765,38 @@
           <a:p>
             <a:pPr lvl="0"/>
             <a:r>
-              <a:rPr lang="en-US"/>
+              <a:rPr lang="en-US" smtClean="0"/>
               <a:t>Click to edit Master text styles</a:t>
             </a:r>
           </a:p>
           <a:p>
             <a:pPr lvl="1"/>
             <a:r>
-              <a:rPr lang="en-US"/>
+              <a:rPr lang="en-US" smtClean="0"/>
               <a:t>Second level</a:t>
             </a:r>
           </a:p>
           <a:p>
             <a:pPr lvl="2"/>
             <a:r>
-              <a:rPr lang="en-US"/>
+              <a:rPr lang="en-US" smtClean="0"/>
               <a:t>Third level</a:t>
             </a:r>
           </a:p>
           <a:p>
             <a:pPr lvl="3"/>
             <a:r>
-              <a:rPr lang="en-US"/>
+              <a:rPr lang="en-US" smtClean="0"/>
               <a:t>Fourth level</a:t>
             </a:r>
           </a:p>
           <a:p>
             <a:pPr lvl="4"/>
             <a:r>
-              <a:rPr lang="en-US"/>
+              <a:rPr lang="en-US" smtClean="0"/>
               <a:t>Fifth level</a:t>
             </a:r>
+            <a:endParaRPr lang="en-US"/>
           </a:p>
         </p:txBody>
       </p:sp>
@@ -825,7 +817,7 @@
           <a:p>
             <a:fld id="{5BCAD085-E8A6-8845-BD4E-CB4CCA059FC4}" type="datetimeFigureOut">
               <a:rPr lang="en-US" smtClean="0"/>
-              <a:t>9/24/2026</a:t>
+              <a:t>1/27/13</a:t>
             </a:fld>
             <a:endParaRPr lang="en-US"/>
           </a:p>
@@ -928,9 +920,10 @@
           </a:lstStyle>
           <a:p>
             <a:r>
-              <a:rPr lang="en-US"/>
+              <a:rPr lang="en-US" smtClean="0"/>
               <a:t>Click to edit Master title style</a:t>
             </a:r>
+            <a:endParaRPr lang="en-US"/>
           </a:p>
         </p:txBody>
       </p:sp>
@@ -1047,7 +1040,7 @@
           <a:p>
             <a:pPr lvl="0"/>
             <a:r>
-              <a:rPr lang="en-US"/>
+              <a:rPr lang="en-US" smtClean="0"/>
               <a:t>Click to edit Master text styles</a:t>
             </a:r>
           </a:p>
@@ -1070,7 +1063,7 @@
           <a:p>
             <a:fld id="{5BCAD085-E8A6-8845-BD4E-CB4CCA059FC4}" type="datetimeFigureOut">
               <a:rPr lang="en-US" smtClean="0"/>
-              <a:t>9/24/2026</a:t>
+              <a:t>1/27/13</a:t>
             </a:fld>
             <a:endParaRPr lang="en-US"/>
           </a:p>
@@ -1164,9 +1157,10 @@
           <a:lstStyle/>
           <a:p>
             <a:r>
-              <a:rPr lang="en-US"/>
+              <a:rPr lang="en-US" smtClean="0"/>
               <a:t>Click to edit Master title style</a:t>
             </a:r>
+            <a:endParaRPr lang="en-US"/>
           </a:p>
         </p:txBody>
       </p:sp>
@@ -1220,37 +1214,38 @@
           <a:p>
             <a:pPr lvl="0"/>
             <a:r>
-              <a:rPr lang="en-US"/>
+              <a:rPr lang="en-US" smtClean="0"/>
               <a:t>Click to edit Master text styles</a:t>
             </a:r>
           </a:p>
           <a:p>
             <a:pPr lvl="1"/>
             <a:r>
-              <a:rPr lang="en-US"/>
+              <a:rPr lang="en-US" smtClean="0"/>
               <a:t>Second level</a:t>
             </a:r>
           </a:p>
           <a:p>
             <a:pPr lvl="2"/>
             <a:r>
-              <a:rPr lang="en-US"/>
+              <a:rPr lang="en-US" smtClean="0"/>
               <a:t>Third level</a:t>
             </a:r>
           </a:p>
           <a:p>
             <a:pPr lvl="3"/>
             <a:r>
-              <a:rPr lang="en-US"/>
+              <a:rPr lang="en-US" smtClean="0"/>
               <a:t>Fourth level</a:t>
             </a:r>
           </a:p>
           <a:p>
             <a:pPr lvl="4"/>
             <a:r>
-              <a:rPr lang="en-US"/>
+              <a:rPr lang="en-US" smtClean="0"/>
               <a:t>Fifth level</a:t>
             </a:r>
+            <a:endParaRPr lang="en-US"/>
           </a:p>
         </p:txBody>
       </p:sp>
@@ -1304,37 +1299,38 @@
           <a:p>
             <a:pPr lvl="0"/>
             <a:r>
-              <a:rPr lang="en-US"/>
+              <a:rPr lang="en-US" smtClean="0"/>
               <a:t>Click to edit Master text styles</a:t>
             </a:r>
           </a:p>
           <a:p>
             <a:pPr lvl="1"/>
             <a:r>
-              <a:rPr lang="en-US"/>
+              <a:rPr lang="en-US" smtClean="0"/>
               <a:t>Second level</a:t>
             </a:r>
           </a:p>
           <a:p>
             <a:pPr lvl="2"/>
             <a:r>
-              <a:rPr lang="en-US"/>
+              <a:rPr lang="en-US" smtClean="0"/>
               <a:t>Third level</a:t>
             </a:r>
           </a:p>
           <a:p>
             <a:pPr lvl="3"/>
             <a:r>
-              <a:rPr lang="en-US"/>
+              <a:rPr lang="en-US" smtClean="0"/>
               <a:t>Fourth level</a:t>
             </a:r>
           </a:p>
           <a:p>
             <a:pPr lvl="4"/>
             <a:r>
-              <a:rPr lang="en-US"/>
+              <a:rPr lang="en-US" smtClean="0"/>
               <a:t>Fifth level</a:t>
             </a:r>
+            <a:endParaRPr lang="en-US"/>
           </a:p>
         </p:txBody>
       </p:sp>
@@ -1355,7 +1351,7 @@
           <a:p>
             <a:fld id="{5BCAD085-E8A6-8845-BD4E-CB4CCA059FC4}" type="datetimeFigureOut">
               <a:rPr lang="en-US" smtClean="0"/>
-              <a:t>9/24/2026</a:t>
+              <a:t>1/27/13</a:t>
             </a:fld>
             <a:endParaRPr lang="en-US"/>
           </a:p>
@@ -1453,9 +1449,10 @@
           </a:lstStyle>
           <a:p>
             <a:r>
-              <a:rPr lang="en-US"/>
+              <a:rPr lang="en-US" smtClean="0"/>
               <a:t>Click to edit Master title style</a:t>
             </a:r>
+            <a:endParaRPr lang="en-US"/>
           </a:p>
         </p:txBody>
       </p:sp>
@@ -1518,7 +1515,7 @@
           <a:p>
             <a:pPr lvl="0"/>
             <a:r>
-              <a:rPr lang="en-US"/>
+              <a:rPr lang="en-US" smtClean="0"/>
               <a:t>Click to edit Master text styles</a:t>
             </a:r>
           </a:p>
@@ -1574,37 +1571,38 @@
           <a:p>
             <a:pPr lvl="0"/>
             <a:r>
-              <a:rPr lang="en-US"/>
+              <a:rPr lang="en-US" smtClean="0"/>
               <a:t>Click to edit Master text styles</a:t>
             </a:r>
           </a:p>
           <a:p>
             <a:pPr lvl="1"/>
             <a:r>
-              <a:rPr lang="en-US"/>
+              <a:rPr lang="en-US" smtClean="0"/>
               <a:t>Second level</a:t>
             </a:r>
           </a:p>
           <a:p>
             <a:pPr lvl="2"/>
             <a:r>
-              <a:rPr lang="en-US"/>
+              <a:rPr lang="en-US" smtClean="0"/>
               <a:t>Third level</a:t>
             </a:r>
           </a:p>
           <a:p>
             <a:pPr lvl="3"/>
             <a:r>
-              <a:rPr lang="en-US"/>
+              <a:rPr lang="en-US" smtClean="0"/>
               <a:t>Fourth level</a:t>
             </a:r>
           </a:p>
           <a:p>
             <a:pPr lvl="4"/>
             <a:r>
-              <a:rPr lang="en-US"/>
+              <a:rPr lang="en-US" smtClean="0"/>
               <a:t>Fifth level</a:t>
             </a:r>
+            <a:endParaRPr lang="en-US"/>
           </a:p>
         </p:txBody>
       </p:sp>
@@ -1667,7 +1665,7 @@
           <a:p>
             <a:pPr lvl="0"/>
             <a:r>
-              <a:rPr lang="en-US"/>
+              <a:rPr lang="en-US" smtClean="0"/>
               <a:t>Click to edit Master text styles</a:t>
             </a:r>
           </a:p>
@@ -1723,37 +1721,38 @@
           <a:p>
             <a:pPr lvl="0"/>
             <a:r>
-              <a:rPr lang="en-US"/>
+              <a:rPr lang="en-US" smtClean="0"/>
               <a:t>Click to edit Master text styles</a:t>
             </a:r>
           </a:p>
           <a:p>
             <a:pPr lvl="1"/>
             <a:r>
-              <a:rPr lang="en-US"/>
+              <a:rPr lang="en-US" smtClean="0"/>
               <a:t>Second level</a:t>
             </a:r>
           </a:p>
           <a:p>
             <a:pPr lvl="2"/>
             <a:r>
-              <a:rPr lang="en-US"/>
+              <a:rPr lang="en-US" smtClean="0"/>
               <a:t>Third level</a:t>
             </a:r>
           </a:p>
           <a:p>
             <a:pPr lvl="3"/>
             <a:r>
-              <a:rPr lang="en-US"/>
+              <a:rPr lang="en-US" smtClean="0"/>
               <a:t>Fourth level</a:t>
             </a:r>
           </a:p>
           <a:p>
             <a:pPr lvl="4"/>
             <a:r>
-              <a:rPr lang="en-US"/>
+              <a:rPr lang="en-US" smtClean="0"/>
               <a:t>Fifth level</a:t>
             </a:r>
+            <a:endParaRPr lang="en-US"/>
           </a:p>
         </p:txBody>
       </p:sp>
@@ -1774,7 +1773,7 @@
           <a:p>
             <a:fld id="{5BCAD085-E8A6-8845-BD4E-CB4CCA059FC4}" type="datetimeFigureOut">
               <a:rPr lang="en-US" smtClean="0"/>
-              <a:t>9/24/2026</a:t>
+              <a:t>1/27/13</a:t>
             </a:fld>
             <a:endParaRPr lang="en-US"/>
           </a:p>
@@ -1868,9 +1867,10 @@
           <a:lstStyle/>
           <a:p>
             <a:r>
-              <a:rPr lang="en-US"/>
+              <a:rPr lang="en-US" smtClean="0"/>
               <a:t>Click to edit Master title style</a:t>
             </a:r>
+            <a:endParaRPr lang="en-US"/>
           </a:p>
         </p:txBody>
       </p:sp>
@@ -1891,7 +1891,7 @@
           <a:p>
             <a:fld id="{5BCAD085-E8A6-8845-BD4E-CB4CCA059FC4}" type="datetimeFigureOut">
               <a:rPr lang="en-US" smtClean="0"/>
-              <a:t>9/24/2026</a:t>
+              <a:t>1/27/13</a:t>
             </a:fld>
             <a:endParaRPr lang="en-US"/>
           </a:p>
@@ -1986,7 +1986,7 @@
           <a:p>
             <a:fld id="{5BCAD085-E8A6-8845-BD4E-CB4CCA059FC4}" type="datetimeFigureOut">
               <a:rPr lang="en-US" smtClean="0"/>
-              <a:t>9/24/2026</a:t>
+              <a:t>1/27/13</a:t>
             </a:fld>
             <a:endParaRPr lang="en-US"/>
           </a:p>
@@ -2089,9 +2089,10 @@
           </a:lstStyle>
           <a:p>
             <a:r>
-              <a:rPr lang="en-US"/>
+              <a:rPr lang="en-US" smtClean="0"/>
               <a:t>Click to edit Master title style</a:t>
             </a:r>
+            <a:endParaRPr lang="en-US"/>
           </a:p>
         </p:txBody>
       </p:sp>
@@ -2145,37 +2146,38 @@
           <a:p>
             <a:pPr lvl="0"/>
             <a:r>
-              <a:rPr lang="en-US"/>
+              <a:rPr lang="en-US" smtClean="0"/>
               <a:t>Click to edit Master text styles</a:t>
             </a:r>
           </a:p>
           <a:p>
             <a:pPr lvl="1"/>
             <a:r>
-              <a:rPr lang="en-US"/>
+              <a:rPr lang="en-US" smtClean="0"/>
               <a:t>Second level</a:t>
             </a:r>
           </a:p>
           <a:p>
             <a:pPr lvl="2"/>
             <a:r>
-              <a:rPr lang="en-US"/>
+              <a:rPr lang="en-US" smtClean="0"/>
               <a:t>Third level</a:t>
             </a:r>
           </a:p>
           <a:p>
             <a:pPr lvl="3"/>
             <a:r>
-              <a:rPr lang="en-US"/>
+              <a:rPr lang="en-US" smtClean="0"/>
               <a:t>Fourth level</a:t>
             </a:r>
           </a:p>
           <a:p>
             <a:pPr lvl="4"/>
             <a:r>
-              <a:rPr lang="en-US"/>
+              <a:rPr lang="en-US" smtClean="0"/>
               <a:t>Fifth level</a:t>
             </a:r>
+            <a:endParaRPr lang="en-US"/>
           </a:p>
         </p:txBody>
       </p:sp>
@@ -2238,7 +2240,7 @@
           <a:p>
             <a:pPr lvl="0"/>
             <a:r>
-              <a:rPr lang="en-US"/>
+              <a:rPr lang="en-US" smtClean="0"/>
               <a:t>Click to edit Master text styles</a:t>
             </a:r>
           </a:p>
@@ -2261,7 +2263,7 @@
           <a:p>
             <a:fld id="{5BCAD085-E8A6-8845-BD4E-CB4CCA059FC4}" type="datetimeFigureOut">
               <a:rPr lang="en-US" smtClean="0"/>
-              <a:t>9/24/2026</a:t>
+              <a:t>1/27/13</a:t>
             </a:fld>
             <a:endParaRPr lang="en-US"/>
           </a:p>
@@ -2364,9 +2366,10 @@
           </a:lstStyle>
           <a:p>
             <a:r>
-              <a:rPr lang="en-US"/>
+              <a:rPr lang="en-US" smtClean="0"/>
               <a:t>Click to edit Master title style</a:t>
             </a:r>
+            <a:endParaRPr lang="en-US"/>
           </a:p>
         </p:txBody>
       </p:sp>
@@ -2490,7 +2493,7 @@
           <a:p>
             <a:pPr lvl="0"/>
             <a:r>
-              <a:rPr lang="en-US"/>
+              <a:rPr lang="en-US" smtClean="0"/>
               <a:t>Click to edit Master text styles</a:t>
             </a:r>
           </a:p>
@@ -2513,7 +2516,7 @@
           <a:p>
             <a:fld id="{5BCAD085-E8A6-8845-BD4E-CB4CCA059FC4}" type="datetimeFigureOut">
               <a:rPr lang="en-US" smtClean="0"/>
-              <a:t>9/24/2026</a:t>
+              <a:t>1/27/13</a:t>
             </a:fld>
             <a:endParaRPr lang="en-US"/>
           </a:p>
@@ -2622,9 +2625,10 @@
           <a:lstStyle/>
           <a:p>
             <a:r>
-              <a:rPr lang="en-US"/>
+              <a:rPr lang="en-US" smtClean="0"/>
               <a:t>Click to edit Master title style</a:t>
             </a:r>
+            <a:endParaRPr lang="en-US"/>
           </a:p>
         </p:txBody>
       </p:sp>
@@ -2655,37 +2659,38 @@
           <a:p>
             <a:pPr lvl="0"/>
             <a:r>
-              <a:rPr lang="en-US"/>
+              <a:rPr lang="en-US" smtClean="0"/>
               <a:t>Click to edit Master text styles</a:t>
             </a:r>
           </a:p>
           <a:p>
             <a:pPr lvl="1"/>
             <a:r>
-              <a:rPr lang="en-US"/>
+              <a:rPr lang="en-US" smtClean="0"/>
               <a:t>Second level</a:t>
             </a:r>
           </a:p>
           <a:p>
             <a:pPr lvl="2"/>
             <a:r>
-              <a:rPr lang="en-US"/>
+              <a:rPr lang="en-US" smtClean="0"/>
               <a:t>Third level</a:t>
             </a:r>
           </a:p>
           <a:p>
             <a:pPr lvl="3"/>
             <a:r>
-              <a:rPr lang="en-US"/>
+              <a:rPr lang="en-US" smtClean="0"/>
               <a:t>Fourth level</a:t>
             </a:r>
           </a:p>
           <a:p>
             <a:pPr lvl="4"/>
             <a:r>
-              <a:rPr lang="en-US"/>
+              <a:rPr lang="en-US" smtClean="0"/>
               <a:t>Fifth level</a:t>
             </a:r>
+            <a:endParaRPr lang="en-US"/>
           </a:p>
         </p:txBody>
       </p:sp>
@@ -2724,7 +2729,7 @@
           <a:p>
             <a:fld id="{5BCAD085-E8A6-8845-BD4E-CB4CCA059FC4}" type="datetimeFigureOut">
               <a:rPr lang="en-US" smtClean="0"/>
-              <a:t>9/24/2026</a:t>
+              <a:t>1/27/13</a:t>
             </a:fld>
             <a:endParaRPr lang="en-US"/>
           </a:p>
@@ -3083,7 +3088,7 @@
 </file>
 
 <file path=ppt/slides/slide1.xml><?xml version="1.0" encoding="utf-8"?>
-<p:sld xmlns:a="http://schemas.openxmlformats.org/drawingml/2006/main" xmlns:r="http://schemas.openxmlformats.org/officeDocument/2006/relationships" xmlns:p="http://schemas.openxmlformats.org/presentationml/2006/main">
+<p:sld xmlns:a="http://schemas.openxmlformats.org/drawingml/2006/main" xmlns:p="http://schemas.openxmlformats.org/presentationml/2006/main" xmlns:r="http://schemas.openxmlformats.org/officeDocument/2006/relationships">
   <p:cSld>
     <p:spTree>
       <p:nvGrpSpPr>
@@ -3091,14 +3096,7 @@
         <p:cNvGrpSpPr/>
         <p:nvPr/>
       </p:nvGrpSpPr>
-      <p:grpSpPr>
-        <a:xfrm>
-          <a:off x="0" y="0"/>
-          <a:ext cx="0" cy="0"/>
-          <a:chOff x="0" y="0"/>
-          <a:chExt cx="0" cy="0"/>
-        </a:xfrm>
-      </p:grpSpPr>
+      <p:grpSpPr/>
       <p:sp>
         <p:nvSpPr>
           <p:cNvPr id="2" name="Rectangle 1"/>
@@ -3139,7 +3137,6 @@
           <a:lstStyle/>
           <a:p>
             <a:pPr algn="ctr"/>
-            <a:endParaRPr/>
           </a:p>
         </p:txBody>
       </p:sp>
@@ -3181,7 +3178,7 @@
           </a:fontRef>
         </p:style>
         <p:txBody>
-          <a:bodyPr wrap="square" rtlCol="0" anchor="ctr"/>
+          <a:bodyPr rtlCol="0" anchor="ctr" wrap="square"/>
           <a:lstStyle/>
           <a:p>
             <a:pPr algn="ctr">
@@ -3236,7 +3233,7 @@
 </file>
 
 <file path=ppt/slides/slide10.xml><?xml version="1.0" encoding="utf-8"?>
-<p:sld xmlns:a="http://schemas.openxmlformats.org/drawingml/2006/main" xmlns:r="http://schemas.openxmlformats.org/officeDocument/2006/relationships" xmlns:p="http://schemas.openxmlformats.org/presentationml/2006/main">
+<p:sld xmlns:a="http://schemas.openxmlformats.org/drawingml/2006/main" xmlns:p="http://schemas.openxmlformats.org/presentationml/2006/main" xmlns:r="http://schemas.openxmlformats.org/officeDocument/2006/relationships">
   <p:cSld>
     <p:spTree>
       <p:nvGrpSpPr>
@@ -3244,14 +3241,7 @@
         <p:cNvGrpSpPr/>
         <p:nvPr/>
       </p:nvGrpSpPr>
-      <p:grpSpPr>
-        <a:xfrm>
-          <a:off x="0" y="0"/>
-          <a:ext cx="0" cy="0"/>
-          <a:chOff x="0" y="0"/>
-          <a:chExt cx="0" cy="0"/>
-        </a:xfrm>
-      </p:grpSpPr>
+      <p:grpSpPr/>
       <p:sp>
         <p:nvSpPr>
           <p:cNvPr id="2" name="Rectangle 1"/>
@@ -3292,7 +3282,6 @@
           <a:lstStyle/>
           <a:p>
             <a:pPr algn="ctr"/>
-            <a:endParaRPr/>
           </a:p>
         </p:txBody>
       </p:sp>
@@ -3334,7 +3323,7 @@
           </a:fontRef>
         </p:style>
         <p:txBody>
-          <a:bodyPr wrap="square" rtlCol="0" anchor="ctr"/>
+          <a:bodyPr rtlCol="0" anchor="ctr" wrap="square"/>
           <a:lstStyle/>
           <a:p>
             <a:pPr algn="ctr">
@@ -3389,7 +3378,7 @@
 </file>
 
 <file path=ppt/slides/slide2.xml><?xml version="1.0" encoding="utf-8"?>
-<p:sld xmlns:a="http://schemas.openxmlformats.org/drawingml/2006/main" xmlns:r="http://schemas.openxmlformats.org/officeDocument/2006/relationships" xmlns:p="http://schemas.openxmlformats.org/presentationml/2006/main">
+<p:sld xmlns:a="http://schemas.openxmlformats.org/drawingml/2006/main" xmlns:p="http://schemas.openxmlformats.org/presentationml/2006/main" xmlns:r="http://schemas.openxmlformats.org/officeDocument/2006/relationships">
   <p:cSld>
     <p:spTree>
       <p:nvGrpSpPr>
@@ -3397,14 +3386,7 @@
         <p:cNvGrpSpPr/>
         <p:nvPr/>
       </p:nvGrpSpPr>
-      <p:grpSpPr>
-        <a:xfrm>
-          <a:off x="0" y="0"/>
-          <a:ext cx="0" cy="0"/>
-          <a:chOff x="0" y="0"/>
-          <a:chExt cx="0" cy="0"/>
-        </a:xfrm>
-      </p:grpSpPr>
+      <p:grpSpPr/>
       <p:sp>
         <p:nvSpPr>
           <p:cNvPr id="2" name="Rectangle 1"/>
@@ -3445,7 +3427,6 @@
           <a:lstStyle/>
           <a:p>
             <a:pPr algn="ctr"/>
-            <a:endParaRPr/>
           </a:p>
         </p:txBody>
       </p:sp>
@@ -3557,7 +3538,7 @@
           </a:fontRef>
         </p:style>
         <p:txBody>
-          <a:bodyPr wrap="square" rtlCol="0" anchor="ctr"/>
+          <a:bodyPr rtlCol="0" anchor="ctr" wrap="square"/>
           <a:lstStyle/>
           <a:p>
             <a:pPr algn="ctr">
@@ -3626,7 +3607,7 @@
           </a:fontRef>
         </p:style>
         <p:txBody>
-          <a:bodyPr wrap="square" rtlCol="0" anchor="ctr"/>
+          <a:bodyPr rtlCol="0" anchor="ctr" wrap="square"/>
           <a:lstStyle/>
           <a:p>
             <a:pPr algn="ctr">
@@ -3695,7 +3676,7 @@
           </a:fontRef>
         </p:style>
         <p:txBody>
-          <a:bodyPr wrap="square" rtlCol="0" anchor="ctr"/>
+          <a:bodyPr rtlCol="0" anchor="ctr" wrap="square"/>
           <a:lstStyle/>
           <a:p>
             <a:pPr algn="ctr">
@@ -3764,7 +3745,7 @@
           </a:fontRef>
         </p:style>
         <p:txBody>
-          <a:bodyPr wrap="square" rtlCol="0" anchor="ctr"/>
+          <a:bodyPr rtlCol="0" anchor="ctr" wrap="square"/>
           <a:lstStyle/>
           <a:p>
             <a:pPr algn="ctr">
@@ -3804,7 +3785,7 @@
 </file>
 
 <file path=ppt/slides/slide3.xml><?xml version="1.0" encoding="utf-8"?>
-<p:sld xmlns:a="http://schemas.openxmlformats.org/drawingml/2006/main" xmlns:r="http://schemas.openxmlformats.org/officeDocument/2006/relationships" xmlns:p="http://schemas.openxmlformats.org/presentationml/2006/main">
+<p:sld xmlns:a="http://schemas.openxmlformats.org/drawingml/2006/main" xmlns:p="http://schemas.openxmlformats.org/presentationml/2006/main" xmlns:r="http://schemas.openxmlformats.org/officeDocument/2006/relationships">
   <p:cSld>
     <p:spTree>
       <p:nvGrpSpPr>
@@ -3812,14 +3793,7 @@
         <p:cNvGrpSpPr/>
         <p:nvPr/>
       </p:nvGrpSpPr>
-      <p:grpSpPr>
-        <a:xfrm>
-          <a:off x="0" y="0"/>
-          <a:ext cx="0" cy="0"/>
-          <a:chOff x="0" y="0"/>
-          <a:chExt cx="0" cy="0"/>
-        </a:xfrm>
-      </p:grpSpPr>
+      <p:grpSpPr/>
       <p:sp>
         <p:nvSpPr>
           <p:cNvPr id="2" name="Rectangle 1"/>
@@ -3860,7 +3834,6 @@
           <a:lstStyle/>
           <a:p>
             <a:pPr algn="ctr"/>
-            <a:endParaRPr/>
           </a:p>
         </p:txBody>
       </p:sp>
@@ -3972,7 +3945,7 @@
           </a:fontRef>
         </p:style>
         <p:txBody>
-          <a:bodyPr wrap="square" rtlCol="0" anchor="ctr"/>
+          <a:bodyPr rtlCol="0" anchor="ctr" wrap="square"/>
           <a:lstStyle/>
           <a:p>
             <a:pPr algn="ctr">
@@ -4041,7 +4014,7 @@
           </a:fontRef>
         </p:style>
         <p:txBody>
-          <a:bodyPr wrap="square" rtlCol="0" anchor="ctr"/>
+          <a:bodyPr rtlCol="0" anchor="ctr" wrap="square"/>
           <a:lstStyle/>
           <a:p>
             <a:pPr algn="ctr">
@@ -4110,7 +4083,7 @@
           </a:fontRef>
         </p:style>
         <p:txBody>
-          <a:bodyPr wrap="square" rtlCol="0" anchor="ctr"/>
+          <a:bodyPr rtlCol="0" anchor="ctr" wrap="square"/>
           <a:lstStyle/>
           <a:p>
             <a:pPr algn="ctr">
@@ -4179,7 +4152,7 @@
           </a:fontRef>
         </p:style>
         <p:txBody>
-          <a:bodyPr wrap="square" rtlCol="0" anchor="ctr"/>
+          <a:bodyPr rtlCol="0" anchor="ctr" wrap="square"/>
           <a:lstStyle/>
           <a:p>
             <a:pPr algn="ctr">
@@ -4248,7 +4221,7 @@
           </a:fontRef>
         </p:style>
         <p:txBody>
-          <a:bodyPr wrap="square" rtlCol="0" anchor="ctr"/>
+          <a:bodyPr rtlCol="0" anchor="ctr" wrap="square"/>
           <a:lstStyle/>
           <a:p>
             <a:pPr algn="ctr">
@@ -4317,7 +4290,7 @@
           </a:fontRef>
         </p:style>
         <p:txBody>
-          <a:bodyPr wrap="square" rtlCol="0" anchor="ctr"/>
+          <a:bodyPr rtlCol="0" anchor="ctr" wrap="square"/>
           <a:lstStyle/>
           <a:p>
             <a:pPr algn="ctr">
@@ -4357,7 +4330,7 @@
 </file>
 
 <file path=ppt/slides/slide4.xml><?xml version="1.0" encoding="utf-8"?>
-<p:sld xmlns:a="http://schemas.openxmlformats.org/drawingml/2006/main" xmlns:r="http://schemas.openxmlformats.org/officeDocument/2006/relationships" xmlns:p="http://schemas.openxmlformats.org/presentationml/2006/main">
+<p:sld xmlns:a="http://schemas.openxmlformats.org/drawingml/2006/main" xmlns:p="http://schemas.openxmlformats.org/presentationml/2006/main" xmlns:r="http://schemas.openxmlformats.org/officeDocument/2006/relationships">
   <p:cSld>
     <p:spTree>
       <p:nvGrpSpPr>
@@ -4365,14 +4338,7 @@
         <p:cNvGrpSpPr/>
         <p:nvPr/>
       </p:nvGrpSpPr>
-      <p:grpSpPr>
-        <a:xfrm>
-          <a:off x="0" y="0"/>
-          <a:ext cx="0" cy="0"/>
-          <a:chOff x="0" y="0"/>
-          <a:chExt cx="0" cy="0"/>
-        </a:xfrm>
-      </p:grpSpPr>
+      <p:grpSpPr/>
       <p:sp>
         <p:nvSpPr>
           <p:cNvPr id="2" name="Rectangle 1"/>
@@ -4413,7 +4379,6 @@
           <a:lstStyle/>
           <a:p>
             <a:pPr algn="ctr"/>
-            <a:endParaRPr/>
           </a:p>
         </p:txBody>
       </p:sp>
@@ -4525,7 +4490,7 @@
           </a:fontRef>
         </p:style>
         <p:txBody>
-          <a:bodyPr wrap="square" rtlCol="0" anchor="ctr"/>
+          <a:bodyPr rtlCol="0" anchor="ctr" wrap="square"/>
           <a:lstStyle/>
           <a:p>
             <a:pPr algn="ctr">
@@ -4594,7 +4559,7 @@
           </a:fontRef>
         </p:style>
         <p:txBody>
-          <a:bodyPr wrap="square" rtlCol="0" anchor="ctr"/>
+          <a:bodyPr rtlCol="0" anchor="ctr" wrap="square"/>
           <a:lstStyle/>
           <a:p>
             <a:pPr algn="ctr">
@@ -4653,7 +4618,7 @@
 </file>
 
 <file path=ppt/slides/slide5.xml><?xml version="1.0" encoding="utf-8"?>
-<p:sld xmlns:a="http://schemas.openxmlformats.org/drawingml/2006/main" xmlns:r="http://schemas.openxmlformats.org/officeDocument/2006/relationships" xmlns:p="http://schemas.openxmlformats.org/presentationml/2006/main">
+<p:sld xmlns:a="http://schemas.openxmlformats.org/drawingml/2006/main" xmlns:p="http://schemas.openxmlformats.org/presentationml/2006/main" xmlns:r="http://schemas.openxmlformats.org/officeDocument/2006/relationships">
   <p:cSld>
     <p:spTree>
       <p:nvGrpSpPr>
@@ -4661,14 +4626,7 @@
         <p:cNvGrpSpPr/>
         <p:nvPr/>
       </p:nvGrpSpPr>
-      <p:grpSpPr>
-        <a:xfrm>
-          <a:off x="0" y="0"/>
-          <a:ext cx="0" cy="0"/>
-          <a:chOff x="0" y="0"/>
-          <a:chExt cx="0" cy="0"/>
-        </a:xfrm>
-      </p:grpSpPr>
+      <p:grpSpPr/>
       <p:sp>
         <p:nvSpPr>
           <p:cNvPr id="2" name="Rectangle 1"/>
@@ -4709,7 +4667,6 @@
           <a:lstStyle/>
           <a:p>
             <a:pPr algn="ctr"/>
-            <a:endParaRPr/>
           </a:p>
         </p:txBody>
       </p:sp>
@@ -4821,7 +4778,7 @@
           </a:fontRef>
         </p:style>
         <p:txBody>
-          <a:bodyPr wrap="square" rtlCol="0" anchor="ctr"/>
+          <a:bodyPr rtlCol="0" anchor="ctr" wrap="square"/>
           <a:lstStyle/>
           <a:p>
             <a:pPr algn="ctr">
@@ -4913,7 +4870,7 @@
           </a:fontRef>
         </p:style>
         <p:txBody>
-          <a:bodyPr wrap="square" rtlCol="0" anchor="ctr"/>
+          <a:bodyPr rtlCol="0" anchor="ctr" wrap="square"/>
           <a:lstStyle/>
           <a:p>
             <a:pPr algn="ctr">
@@ -4976,7 +4933,7 @@
 </file>
 
 <file path=ppt/slides/slide6.xml><?xml version="1.0" encoding="utf-8"?>
-<p:sld xmlns:a="http://schemas.openxmlformats.org/drawingml/2006/main" xmlns:r="http://schemas.openxmlformats.org/officeDocument/2006/relationships" xmlns:p="http://schemas.openxmlformats.org/presentationml/2006/main">
+<p:sld xmlns:a="http://schemas.openxmlformats.org/drawingml/2006/main" xmlns:p="http://schemas.openxmlformats.org/presentationml/2006/main" xmlns:r="http://schemas.openxmlformats.org/officeDocument/2006/relationships">
   <p:cSld>
     <p:spTree>
       <p:nvGrpSpPr>
@@ -4984,14 +4941,7 @@
         <p:cNvGrpSpPr/>
         <p:nvPr/>
       </p:nvGrpSpPr>
-      <p:grpSpPr>
-        <a:xfrm>
-          <a:off x="0" y="0"/>
-          <a:ext cx="0" cy="0"/>
-          <a:chOff x="0" y="0"/>
-          <a:chExt cx="0" cy="0"/>
-        </a:xfrm>
-      </p:grpSpPr>
+      <p:grpSpPr/>
       <p:sp>
         <p:nvSpPr>
           <p:cNvPr id="2" name="Rectangle 1"/>
@@ -5032,7 +4982,6 @@
           <a:lstStyle/>
           <a:p>
             <a:pPr algn="ctr"/>
-            <a:endParaRPr/>
           </a:p>
         </p:txBody>
       </p:sp>
@@ -5144,7 +5093,7 @@
           </a:fontRef>
         </p:style>
         <p:txBody>
-          <a:bodyPr wrap="square" rtlCol="0" anchor="ctr"/>
+          <a:bodyPr rtlCol="0" anchor="ctr" wrap="square"/>
           <a:lstStyle/>
           <a:p>
             <a:pPr algn="ctr">
@@ -5213,7 +5162,7 @@
           </a:fontRef>
         </p:style>
         <p:txBody>
-          <a:bodyPr wrap="square" rtlCol="0" anchor="ctr"/>
+          <a:bodyPr rtlCol="0" anchor="ctr" wrap="square"/>
           <a:lstStyle/>
           <a:p>
             <a:pPr algn="ctr">
@@ -5282,7 +5231,7 @@
           </a:fontRef>
         </p:style>
         <p:txBody>
-          <a:bodyPr wrap="square" rtlCol="0" anchor="ctr"/>
+          <a:bodyPr rtlCol="0" anchor="ctr" wrap="square"/>
           <a:lstStyle/>
           <a:p>
             <a:pPr algn="ctr">
@@ -5322,7 +5271,7 @@
 </file>
 
 <file path=ppt/slides/slide7.xml><?xml version="1.0" encoding="utf-8"?>
-<p:sld xmlns:a="http://schemas.openxmlformats.org/drawingml/2006/main" xmlns:r="http://schemas.openxmlformats.org/officeDocument/2006/relationships" xmlns:p="http://schemas.openxmlformats.org/presentationml/2006/main">
+<p:sld xmlns:a="http://schemas.openxmlformats.org/drawingml/2006/main" xmlns:p="http://schemas.openxmlformats.org/presentationml/2006/main" xmlns:r="http://schemas.openxmlformats.org/officeDocument/2006/relationships">
   <p:cSld>
     <p:spTree>
       <p:nvGrpSpPr>
@@ -5330,14 +5279,7 @@
         <p:cNvGrpSpPr/>
         <p:nvPr/>
       </p:nvGrpSpPr>
-      <p:grpSpPr>
-        <a:xfrm>
-          <a:off x="0" y="0"/>
-          <a:ext cx="0" cy="0"/>
-          <a:chOff x="0" y="0"/>
-          <a:chExt cx="0" cy="0"/>
-        </a:xfrm>
-      </p:grpSpPr>
+      <p:grpSpPr/>
       <p:sp>
         <p:nvSpPr>
           <p:cNvPr id="2" name="Rectangle 1"/>
@@ -5378,7 +5320,6 @@
           <a:lstStyle/>
           <a:p>
             <a:pPr algn="ctr"/>
-            <a:endParaRPr/>
           </a:p>
         </p:txBody>
       </p:sp>
@@ -5490,7 +5431,7 @@
           </a:fontRef>
         </p:style>
         <p:txBody>
-          <a:bodyPr wrap="square" rtlCol="0" anchor="ctr"/>
+          <a:bodyPr rtlCol="0" anchor="ctr" wrap="square"/>
           <a:lstStyle/>
           <a:p>
             <a:pPr algn="ctr">
@@ -5567,7 +5508,7 @@
           </a:fontRef>
         </p:style>
         <p:txBody>
-          <a:bodyPr wrap="square" rtlCol="0" anchor="ctr"/>
+          <a:bodyPr rtlCol="0" anchor="ctr" wrap="square"/>
           <a:lstStyle/>
           <a:p>
             <a:pPr algn="ctr">
@@ -5615,7 +5556,7 @@
 </file>
 
 <file path=ppt/slides/slide8.xml><?xml version="1.0" encoding="utf-8"?>
-<p:sld xmlns:a="http://schemas.openxmlformats.org/drawingml/2006/main" xmlns:r="http://schemas.openxmlformats.org/officeDocument/2006/relationships" xmlns:p="http://schemas.openxmlformats.org/presentationml/2006/main">
+<p:sld xmlns:a="http://schemas.openxmlformats.org/drawingml/2006/main" xmlns:p="http://schemas.openxmlformats.org/presentationml/2006/main" xmlns:r="http://schemas.openxmlformats.org/officeDocument/2006/relationships">
   <p:cSld>
     <p:spTree>
       <p:nvGrpSpPr>
@@ -5623,14 +5564,7 @@
         <p:cNvGrpSpPr/>
         <p:nvPr/>
       </p:nvGrpSpPr>
-      <p:grpSpPr>
-        <a:xfrm>
-          <a:off x="0" y="0"/>
-          <a:ext cx="0" cy="0"/>
-          <a:chOff x="0" y="0"/>
-          <a:chExt cx="0" cy="0"/>
-        </a:xfrm>
-      </p:grpSpPr>
+      <p:grpSpPr/>
       <p:sp>
         <p:nvSpPr>
           <p:cNvPr id="2" name="Rectangle 1"/>
@@ -5671,7 +5605,6 @@
           <a:lstStyle/>
           <a:p>
             <a:pPr algn="ctr"/>
-            <a:endParaRPr/>
           </a:p>
         </p:txBody>
       </p:sp>
@@ -5783,7 +5716,7 @@
           </a:fontRef>
         </p:style>
         <p:txBody>
-          <a:bodyPr wrap="square" rtlCol="0" anchor="ctr"/>
+          <a:bodyPr rtlCol="0" anchor="ctr" wrap="square"/>
           <a:lstStyle/>
           <a:p>
             <a:pPr algn="ctr">
@@ -5860,7 +5793,7 @@
           </a:fontRef>
         </p:style>
         <p:txBody>
-          <a:bodyPr wrap="square" rtlCol="0" anchor="ctr"/>
+          <a:bodyPr rtlCol="0" anchor="ctr" wrap="square"/>
           <a:lstStyle/>
           <a:p>
             <a:pPr algn="ctr">
@@ -5908,7 +5841,7 @@
 </file>
 
 <file path=ppt/slides/slide9.xml><?xml version="1.0" encoding="utf-8"?>
-<p:sld xmlns:a="http://schemas.openxmlformats.org/drawingml/2006/main" xmlns:r="http://schemas.openxmlformats.org/officeDocument/2006/relationships" xmlns:p="http://schemas.openxmlformats.org/presentationml/2006/main">
+<p:sld xmlns:a="http://schemas.openxmlformats.org/drawingml/2006/main" xmlns:p="http://schemas.openxmlformats.org/presentationml/2006/main" xmlns:r="http://schemas.openxmlformats.org/officeDocument/2006/relationships">
   <p:cSld>
     <p:spTree>
       <p:nvGrpSpPr>
@@ -5916,14 +5849,7 @@
         <p:cNvGrpSpPr/>
         <p:nvPr/>
       </p:nvGrpSpPr>
-      <p:grpSpPr>
-        <a:xfrm>
-          <a:off x="0" y="0"/>
-          <a:ext cx="0" cy="0"/>
-          <a:chOff x="0" y="0"/>
-          <a:chExt cx="0" cy="0"/>
-        </a:xfrm>
-      </p:grpSpPr>
+      <p:grpSpPr/>
       <p:sp>
         <p:nvSpPr>
           <p:cNvPr id="2" name="Rectangle 1"/>
@@ -5964,7 +5890,6 @@
           <a:lstStyle/>
           <a:p>
             <a:pPr algn="ctr"/>
-            <a:endParaRPr/>
           </a:p>
         </p:txBody>
       </p:sp>
@@ -6076,7 +6001,7 @@
           </a:fontRef>
         </p:style>
         <p:txBody>
-          <a:bodyPr wrap="square" rtlCol="0" anchor="ctr"/>
+          <a:bodyPr rtlCol="0" anchor="ctr" wrap="square"/>
           <a:lstStyle/>
           <a:p>
             <a:pPr algn="ctr">
